--- a/test_fixtures/test_features.pptx
+++ b/test_fixtures/test_features.pptx
@@ -104,6 +104,7 @@
     <p:sldId id="352" r:id="rId105"/>
     <p:sldId id="353" r:id="rId106"/>
     <p:sldId id="354" r:id="rId107"/>
+    <p:sldId id="355" r:id="rId108"/>
   </p:sldIdLst>
   <p:sldSz cx="9144000" cy="6858000" type="screen4x3"/>
   <p:notesSz cx="6858000" cy="9144000"/>
@@ -8440,6 +8441,340 @@
             </a:r>
           </a:p>
         </p:txBody>
+      </p:sp>
+    </p:spTree>
+  </p:cSld>
+  <p:clrMapOvr>
+    <a:masterClrMapping/>
+  </p:clrMapOvr>
+</p:sld>
+</file>
+
+<file path=ppt/slides/slide100.xml><?xml version="1.0" encoding="utf-8"?>
+<p:sld xmlns:a="http://schemas.openxmlformats.org/drawingml/2006/main" xmlns:p="http://schemas.openxmlformats.org/presentationml/2006/main" xmlns:r="http://schemas.openxmlformats.org/officeDocument/2006/relationships">
+  <p:cSld>
+    <p:spTree>
+      <p:nvGrpSpPr>
+        <p:cNvPr id="1" name=""/>
+        <p:cNvGrpSpPr/>
+        <p:nvPr/>
+      </p:nvGrpSpPr>
+      <p:grpSpPr/>
+      <p:sp>
+        <p:nvSpPr>
+          <p:cNvPr id="10000" name="P_rect"/>
+          <p:cNvSpPr/>
+          <p:nvPr/>
+        </p:nvSpPr>
+        <p:spPr>
+          <a:xfrm>
+            <a:off x="228600" y="228600"/>
+            <a:ext cx="1188720" cy="868680"/>
+          </a:xfrm>
+          <a:prstGeom prst="rect">
+            <a:avLst/>
+          </a:prstGeom>
+          <a:solidFill>
+            <a:srgbClr val="5B9BD5"/>
+          </a:solidFill>
+        </p:spPr>
+      </p:sp>
+      <p:sp>
+        <p:nvSpPr>
+          <p:cNvPr id="10001" name="P_donut"/>
+          <p:cNvSpPr/>
+          <p:nvPr/>
+        </p:nvSpPr>
+        <p:spPr>
+          <a:xfrm>
+            <a:off x="1676400" y="228600"/>
+            <a:ext cx="1188720" cy="868680"/>
+          </a:xfrm>
+          <a:prstGeom prst="donut">
+            <a:avLst/>
+          </a:prstGeom>
+          <a:solidFill>
+            <a:srgbClr val="5B9BD5"/>
+          </a:solidFill>
+        </p:spPr>
+      </p:sp>
+      <p:sp>
+        <p:nvSpPr>
+          <p:cNvPr id="10002" name="P_cloudCallout"/>
+          <p:cNvSpPr/>
+          <p:nvPr/>
+        </p:nvSpPr>
+        <p:spPr>
+          <a:xfrm>
+            <a:off x="3124200" y="228600"/>
+            <a:ext cx="1188720" cy="868680"/>
+          </a:xfrm>
+          <a:prstGeom prst="cloudCallout">
+            <a:avLst/>
+          </a:prstGeom>
+          <a:solidFill>
+            <a:srgbClr val="5B9BD5"/>
+          </a:solidFill>
+        </p:spPr>
+      </p:sp>
+      <p:sp>
+        <p:nvSpPr>
+          <p:cNvPr id="10003" name="P_star12"/>
+          <p:cNvSpPr/>
+          <p:nvPr/>
+        </p:nvSpPr>
+        <p:spPr>
+          <a:xfrm>
+            <a:off x="4572000" y="228600"/>
+            <a:ext cx="1188720" cy="868680"/>
+          </a:xfrm>
+          <a:prstGeom prst="star12">
+            <a:avLst/>
+          </a:prstGeom>
+          <a:solidFill>
+            <a:srgbClr val="5B9BD5"/>
+          </a:solidFill>
+        </p:spPr>
+      </p:sp>
+      <p:sp>
+        <p:nvSpPr>
+          <p:cNvPr id="10004" name="P_circularArrow"/>
+          <p:cNvSpPr/>
+          <p:nvPr/>
+        </p:nvSpPr>
+        <p:spPr>
+          <a:xfrm>
+            <a:off x="6019800" y="228600"/>
+            <a:ext cx="1188720" cy="868680"/>
+          </a:xfrm>
+          <a:prstGeom prst="circularArrow">
+            <a:avLst/>
+          </a:prstGeom>
+          <a:solidFill>
+            <a:srgbClr val="5B9BD5"/>
+          </a:solidFill>
+        </p:spPr>
+      </p:sp>
+      <p:sp>
+        <p:nvSpPr>
+          <p:cNvPr id="10005" name="P_uturnArrow"/>
+          <p:cNvSpPr/>
+          <p:nvPr/>
+        </p:nvSpPr>
+        <p:spPr>
+          <a:xfrm>
+            <a:off x="7467600" y="228600"/>
+            <a:ext cx="1188720" cy="868680"/>
+          </a:xfrm>
+          <a:prstGeom prst="uturnArrow">
+            <a:avLst/>
+          </a:prstGeom>
+          <a:solidFill>
+            <a:srgbClr val="5B9BD5"/>
+          </a:solidFill>
+        </p:spPr>
+      </p:sp>
+      <p:sp>
+        <p:nvSpPr>
+          <p:cNvPr id="10006" name="P_quadArrow"/>
+          <p:cNvSpPr/>
+          <p:nvPr/>
+        </p:nvSpPr>
+        <p:spPr>
+          <a:xfrm>
+            <a:off x="228600" y="1828800"/>
+            <a:ext cx="1188720" cy="868680"/>
+          </a:xfrm>
+          <a:prstGeom prst="quadArrow">
+            <a:avLst/>
+          </a:prstGeom>
+          <a:solidFill>
+            <a:srgbClr val="5B9BD5"/>
+          </a:solidFill>
+        </p:spPr>
+      </p:sp>
+      <p:sp>
+        <p:nvSpPr>
+          <p:cNvPr id="10007" name="P_lightningBolt"/>
+          <p:cNvSpPr/>
+          <p:nvPr/>
+        </p:nvSpPr>
+        <p:spPr>
+          <a:xfrm>
+            <a:off x="1676400" y="1828800"/>
+            <a:ext cx="1188720" cy="868680"/>
+          </a:xfrm>
+          <a:prstGeom prst="lightningBolt">
+            <a:avLst/>
+          </a:prstGeom>
+          <a:solidFill>
+            <a:srgbClr val="5B9BD5"/>
+          </a:solidFill>
+        </p:spPr>
+      </p:sp>
+      <p:sp>
+        <p:nvSpPr>
+          <p:cNvPr id="10008" name="P_sun"/>
+          <p:cNvSpPr/>
+          <p:nvPr/>
+        </p:nvSpPr>
+        <p:spPr>
+          <a:xfrm>
+            <a:off x="3124200" y="1828800"/>
+            <a:ext cx="1188720" cy="868680"/>
+          </a:xfrm>
+          <a:prstGeom prst="sun">
+            <a:avLst/>
+          </a:prstGeom>
+          <a:solidFill>
+            <a:srgbClr val="5B9BD5"/>
+          </a:solidFill>
+        </p:spPr>
+      </p:sp>
+      <p:sp>
+        <p:nvSpPr>
+          <p:cNvPr id="10009" name="P_moon"/>
+          <p:cNvSpPr/>
+          <p:nvPr/>
+        </p:nvSpPr>
+        <p:spPr>
+          <a:xfrm>
+            <a:off x="4572000" y="1828800"/>
+            <a:ext cx="1188720" cy="868680"/>
+          </a:xfrm>
+          <a:prstGeom prst="moon">
+            <a:avLst/>
+          </a:prstGeom>
+          <a:solidFill>
+            <a:srgbClr val="5B9BD5"/>
+          </a:solidFill>
+        </p:spPr>
+      </p:sp>
+      <p:sp>
+        <p:nvSpPr>
+          <p:cNvPr id="10010" name="P_cube"/>
+          <p:cNvSpPr/>
+          <p:nvPr/>
+        </p:nvSpPr>
+        <p:spPr>
+          <a:xfrm>
+            <a:off x="6019800" y="1828800"/>
+            <a:ext cx="1188720" cy="868680"/>
+          </a:xfrm>
+          <a:prstGeom prst="cube">
+            <a:avLst/>
+          </a:prstGeom>
+          <a:solidFill>
+            <a:srgbClr val="5B9BD5"/>
+          </a:solidFill>
+        </p:spPr>
+      </p:sp>
+      <p:sp>
+        <p:nvSpPr>
+          <p:cNvPr id="10011" name="P_flowChartDocument"/>
+          <p:cNvSpPr/>
+          <p:nvPr/>
+        </p:nvSpPr>
+        <p:spPr>
+          <a:xfrm>
+            <a:off x="7467600" y="1828800"/>
+            <a:ext cx="1188720" cy="868680"/>
+          </a:xfrm>
+          <a:prstGeom prst="flowChartDocument">
+            <a:avLst/>
+          </a:prstGeom>
+          <a:solidFill>
+            <a:srgbClr val="5B9BD5"/>
+          </a:solidFill>
+        </p:spPr>
+      </p:sp>
+      <p:sp>
+        <p:nvSpPr>
+          <p:cNvPr id="10100" name="W_below"/>
+          <p:cNvSpPr/>
+          <p:nvPr/>
+        </p:nvSpPr>
+        <p:spPr>
+          <a:xfrm>
+            <a:off x="457200" y="4114800"/>
+            <a:ext cx="1371600" cy="914400"/>
+          </a:xfrm>
+          <a:prstGeom prst="wedgeRectCallout">
+            <a:avLst>
+              <a:gd name="adj1" fmla="val 30000"/>
+              <a:gd name="adj2" fmla="val 80000"/>
+            </a:avLst>
+          </a:prstGeom>
+          <a:solidFill>
+            <a:srgbClr val="5B9BD5"/>
+          </a:solidFill>
+        </p:spPr>
+      </p:sp>
+      <p:sp>
+        <p:nvSpPr>
+          <p:cNvPr id="10101" name="W_above"/>
+          <p:cNvSpPr/>
+          <p:nvPr/>
+        </p:nvSpPr>
+        <p:spPr>
+          <a:xfrm>
+            <a:off x="2590800" y="4114800"/>
+            <a:ext cx="1371600" cy="914400"/>
+          </a:xfrm>
+          <a:prstGeom prst="wedgeRectCallout">
+            <a:avLst>
+              <a:gd name="adj1" fmla="val 30000"/>
+              <a:gd name="adj2" fmla="val -80000"/>
+            </a:avLst>
+          </a:prstGeom>
+          <a:solidFill>
+            <a:srgbClr val="5B9BD5"/>
+          </a:solidFill>
+        </p:spPr>
+      </p:sp>
+      <p:sp>
+        <p:nvSpPr>
+          <p:cNvPr id="10102" name="W_left"/>
+          <p:cNvSpPr/>
+          <p:nvPr/>
+        </p:nvSpPr>
+        <p:spPr>
+          <a:xfrm>
+            <a:off x="4724400" y="4114800"/>
+            <a:ext cx="1371600" cy="914400"/>
+          </a:xfrm>
+          <a:prstGeom prst="wedgeRectCallout">
+            <a:avLst>
+              <a:gd name="adj1" fmla="val -80000"/>
+              <a:gd name="adj2" fmla="val 0"/>
+            </a:avLst>
+          </a:prstGeom>
+          <a:solidFill>
+            <a:srgbClr val="5B9BD5"/>
+          </a:solidFill>
+        </p:spPr>
+      </p:sp>
+      <p:sp>
+        <p:nvSpPr>
+          <p:cNvPr id="10103" name="W_right"/>
+          <p:cNvSpPr/>
+          <p:nvPr/>
+        </p:nvSpPr>
+        <p:spPr>
+          <a:xfrm>
+            <a:off x="6858000" y="4114800"/>
+            <a:ext cx="1371600" cy="914400"/>
+          </a:xfrm>
+          <a:prstGeom prst="wedgeRectCallout">
+            <a:avLst>
+              <a:gd name="adj1" fmla="val 80000"/>
+              <a:gd name="adj2" fmla="val 10000"/>
+            </a:avLst>
+          </a:prstGeom>
+          <a:solidFill>
+            <a:srgbClr val="5B9BD5"/>
+          </a:solidFill>
+        </p:spPr>
       </p:sp>
     </p:spTree>
   </p:cSld>

--- a/test_fixtures/test_features.pptx
+++ b/test_fixtures/test_features.pptx
@@ -105,6 +105,7 @@
     <p:sldId id="353" r:id="rId106"/>
     <p:sldId id="354" r:id="rId107"/>
     <p:sldId id="355" r:id="rId108"/>
+    <p:sldId id="356" r:id="rId109"/>
   </p:sldIdLst>
   <p:sldSz cx="9144000" cy="6858000" type="screen4x3"/>
   <p:notesSz cx="6858000" cy="9144000"/>
@@ -8774,6 +8775,168 @@
           <a:solidFill>
             <a:srgbClr val="5B9BD5"/>
           </a:solidFill>
+        </p:spPr>
+      </p:sp>
+    </p:spTree>
+  </p:cSld>
+  <p:clrMapOvr>
+    <a:masterClrMapping/>
+  </p:clrMapOvr>
+</p:sld>
+</file>
+
+<file path=ppt/slides/slide101.xml><?xml version="1.0" encoding="utf-8"?>
+<p:sld xmlns:a="http://schemas.openxmlformats.org/drawingml/2006/main" xmlns:p="http://schemas.openxmlformats.org/presentationml/2006/main" xmlns:r="http://schemas.openxmlformats.org/officeDocument/2006/relationships">
+  <p:cSld>
+    <p:spTree>
+      <p:nvGrpSpPr>
+        <p:cNvPr id="1" name=""/>
+        <p:cNvGrpSpPr/>
+        <p:nvPr/>
+      </p:nvGrpSpPr>
+      <p:grpSpPr/>
+      <p:sp>
+        <p:nvSpPr>
+          <p:cNvPr id="10200" name="G_arc"/>
+          <p:cNvSpPr/>
+          <p:nvPr/>
+        </p:nvSpPr>
+        <p:spPr>
+          <a:xfrm>
+            <a:off x="228600" y="1371600"/>
+            <a:ext cx="1188720" cy="868680"/>
+          </a:xfrm>
+          <a:prstGeom prst="arc">
+            <a:avLst/>
+          </a:prstGeom>
+          <a:solidFill>
+            <a:srgbClr val="5B9BD5"/>
+          </a:solidFill>
+          <a:ln w="19050">
+            <a:solidFill>
+              <a:srgbClr val="1F3864"/>
+            </a:solidFill>
+          </a:ln>
+        </p:spPr>
+      </p:sp>
+      <p:sp>
+        <p:nvSpPr>
+          <p:cNvPr id="10201" name="G_cube"/>
+          <p:cNvSpPr/>
+          <p:nvPr/>
+        </p:nvSpPr>
+        <p:spPr>
+          <a:xfrm>
+            <a:off x="1676400" y="1371600"/>
+            <a:ext cx="1188720" cy="868680"/>
+          </a:xfrm>
+          <a:prstGeom prst="cube">
+            <a:avLst/>
+          </a:prstGeom>
+          <a:solidFill>
+            <a:srgbClr val="5B9BD5"/>
+          </a:solidFill>
+          <a:ln w="19050">
+            <a:solidFill>
+              <a:srgbClr val="1F3864"/>
+            </a:solidFill>
+          </a:ln>
+        </p:spPr>
+      </p:sp>
+      <p:sp>
+        <p:nvSpPr>
+          <p:cNvPr id="10202" name="G_chartPlus"/>
+          <p:cNvSpPr/>
+          <p:nvPr/>
+        </p:nvSpPr>
+        <p:spPr>
+          <a:xfrm>
+            <a:off x="3124200" y="1371600"/>
+            <a:ext cx="1188720" cy="868680"/>
+          </a:xfrm>
+          <a:prstGeom prst="chartPlus">
+            <a:avLst/>
+          </a:prstGeom>
+          <a:solidFill>
+            <a:srgbClr val="5B9BD5"/>
+          </a:solidFill>
+          <a:ln w="19050">
+            <a:solidFill>
+              <a:srgbClr val="1F3864"/>
+            </a:solidFill>
+          </a:ln>
+        </p:spPr>
+      </p:sp>
+      <p:sp>
+        <p:nvSpPr>
+          <p:cNvPr id="10203" name="G_bentConnector3"/>
+          <p:cNvSpPr/>
+          <p:nvPr/>
+        </p:nvSpPr>
+        <p:spPr>
+          <a:xfrm>
+            <a:off x="4572000" y="1371600"/>
+            <a:ext cx="1188720" cy="868680"/>
+          </a:xfrm>
+          <a:prstGeom prst="bentConnector3">
+            <a:avLst/>
+          </a:prstGeom>
+          <a:solidFill>
+            <a:srgbClr val="5B9BD5"/>
+          </a:solidFill>
+          <a:ln w="19050">
+            <a:solidFill>
+              <a:srgbClr val="1F3864"/>
+            </a:solidFill>
+          </a:ln>
+        </p:spPr>
+      </p:sp>
+      <p:sp>
+        <p:nvSpPr>
+          <p:cNvPr id="10204" name="G_actionButtonHome"/>
+          <p:cNvSpPr/>
+          <p:nvPr/>
+        </p:nvSpPr>
+        <p:spPr>
+          <a:xfrm>
+            <a:off x="6019800" y="1371600"/>
+            <a:ext cx="1188720" cy="868680"/>
+          </a:xfrm>
+          <a:prstGeom prst="actionButtonHome">
+            <a:avLst/>
+          </a:prstGeom>
+          <a:solidFill>
+            <a:srgbClr val="5B9BD5"/>
+          </a:solidFill>
+          <a:ln w="19050">
+            <a:solidFill>
+              <a:srgbClr val="1F3864"/>
+            </a:solidFill>
+          </a:ln>
+        </p:spPr>
+      </p:sp>
+      <p:sp>
+        <p:nvSpPr>
+          <p:cNvPr id="10205" name="G_star7"/>
+          <p:cNvSpPr/>
+          <p:nvPr/>
+        </p:nvSpPr>
+        <p:spPr>
+          <a:xfrm>
+            <a:off x="7467600" y="1371600"/>
+            <a:ext cx="1188720" cy="868680"/>
+          </a:xfrm>
+          <a:prstGeom prst="star7">
+            <a:avLst/>
+          </a:prstGeom>
+          <a:solidFill>
+            <a:srgbClr val="5B9BD5"/>
+          </a:solidFill>
+          <a:ln w="19050">
+            <a:solidFill>
+              <a:srgbClr val="1F3864"/>
+            </a:solidFill>
+          </a:ln>
         </p:spPr>
       </p:sp>
     </p:spTree>

--- a/test_fixtures/test_features.pptx
+++ b/test_fixtures/test_features.pptx
@@ -106,6 +106,7 @@
     <p:sldId id="354" r:id="rId107"/>
     <p:sldId id="355" r:id="rId108"/>
     <p:sldId id="356" r:id="rId109"/>
+    <p:sldId id="357" r:id="rId110"/>
   </p:sldIdLst>
   <p:sldSz cx="9144000" cy="6858000" type="screen4x3"/>
   <p:notesSz cx="6858000" cy="9144000"/>
@@ -8814,7 +8815,7 @@
           </a:solidFill>
           <a:ln w="19050">
             <a:solidFill>
-              <a:srgbClr val="1F3864"/>
+              <a:srgbClr val="FFC000"/>
             </a:solidFill>
           </a:ln>
         </p:spPr>
@@ -8838,7 +8839,7 @@
           </a:solidFill>
           <a:ln w="19050">
             <a:solidFill>
-              <a:srgbClr val="1F3864"/>
+              <a:srgbClr val="FFC000"/>
             </a:solidFill>
           </a:ln>
         </p:spPr>
@@ -8862,7 +8863,7 @@
           </a:solidFill>
           <a:ln w="19050">
             <a:solidFill>
-              <a:srgbClr val="1F3864"/>
+              <a:srgbClr val="FFC000"/>
             </a:solidFill>
           </a:ln>
         </p:spPr>
@@ -8886,7 +8887,7 @@
           </a:solidFill>
           <a:ln w="19050">
             <a:solidFill>
-              <a:srgbClr val="1F3864"/>
+              <a:srgbClr val="FFC000"/>
             </a:solidFill>
           </a:ln>
         </p:spPr>
@@ -8910,7 +8911,7 @@
           </a:solidFill>
           <a:ln w="19050">
             <a:solidFill>
-              <a:srgbClr val="1F3864"/>
+              <a:srgbClr val="FFC000"/>
             </a:solidFill>
           </a:ln>
         </p:spPr>
@@ -8934,7 +8935,91 @@
           </a:solidFill>
           <a:ln w="19050">
             <a:solidFill>
-              <a:srgbClr val="1F3864"/>
+              <a:srgbClr val="FFC000"/>
+            </a:solidFill>
+          </a:ln>
+        </p:spPr>
+      </p:sp>
+    </p:spTree>
+  </p:cSld>
+  <p:clrMapOvr>
+    <a:masterClrMapping/>
+  </p:clrMapOvr>
+</p:sld>
+</file>
+
+<file path=ppt/slides/slide102.xml><?xml version="1.0" encoding="utf-8"?>
+<p:sld xmlns:a="http://schemas.openxmlformats.org/drawingml/2006/main" xmlns:p="http://schemas.openxmlformats.org/presentationml/2006/main" xmlns:r="http://schemas.openxmlformats.org/officeDocument/2006/relationships">
+  <p:cSld>
+    <p:spTree>
+      <p:nvGrpSpPr>
+        <p:cNvPr id="1" name=""/>
+        <p:cNvGrpSpPr/>
+        <p:nvPr/>
+      </p:nvGrpSpPr>
+      <p:grpSpPr/>
+      <p:sp>
+        <p:nvSpPr>
+          <p:cNvPr id="10300" name="CustStyled"/>
+          <p:cNvSpPr/>
+          <p:nvPr/>
+        </p:nvSpPr>
+        <p:spPr>
+          <a:xfrm>
+            <a:off x="2286000" y="1371600"/>
+            <a:ext cx="2743200" cy="2743200"/>
+          </a:xfrm>
+          <a:custGeom>
+            <a:avLst/>
+            <a:gdLst/>
+            <a:rect l="l" t="t" r="r" b="b"/>
+            <a:pathLst>
+              <a:path w="100" h="100" stroke="0">
+                <a:moveTo>
+                  <a:pt x="0" y="0"/>
+                </a:moveTo>
+                <a:lnTo>
+                  <a:pt x="100" y="0"/>
+                </a:lnTo>
+                <a:lnTo>
+                  <a:pt x="100" y="100"/>
+                </a:lnTo>
+                <a:lnTo>
+                  <a:pt x="0" y="100"/>
+                </a:lnTo>
+                <a:close/>
+              </a:path>
+              <a:path w="50" h="50" fill="none">
+                <a:moveTo>
+                  <a:pt x="0" y="50"/>
+                </a:moveTo>
+                <a:lnTo>
+                  <a:pt x="50" y="0"/>
+                </a:lnTo>
+              </a:path>
+              <a:path w="100" h="100" fill="darken" stroke="0">
+                <a:moveTo>
+                  <a:pt x="25" y="25"/>
+                </a:moveTo>
+                <a:lnTo>
+                  <a:pt x="50" y="25"/>
+                </a:lnTo>
+                <a:lnTo>
+                  <a:pt x="50" y="50"/>
+                </a:lnTo>
+                <a:lnTo>
+                  <a:pt x="25" y="50"/>
+                </a:lnTo>
+                <a:close/>
+              </a:path>
+            </a:pathLst>
+          </a:custGeom>
+          <a:solidFill>
+            <a:srgbClr val="5B9BD5"/>
+          </a:solidFill>
+          <a:ln w="28575">
+            <a:solidFill>
+              <a:srgbClr val="FFC000"/>
             </a:solidFill>
           </a:ln>
         </p:spPr>

--- a/test_fixtures/test_features.pptx
+++ b/test_fixtures/test_features.pptx
@@ -107,6 +107,9 @@
     <p:sldId id="355" r:id="rId108"/>
     <p:sldId id="356" r:id="rId109"/>
     <p:sldId id="357" r:id="rId110"/>
+    <p:sldId id="358" r:id="rId111"/>
+    <p:sldId id="359" r:id="rId112"/>
+    <p:sldId id="360" r:id="rId113"/>
   </p:sldIdLst>
   <p:sldSz cx="9144000" cy="6858000" type="screen4x3"/>
   <p:notesSz cx="6858000" cy="9144000"/>
@@ -9024,6 +9027,101 @@
           </a:ln>
         </p:spPr>
       </p:sp>
+    </p:spTree>
+  </p:cSld>
+  <p:clrMapOvr>
+    <a:masterClrMapping/>
+  </p:clrMapOvr>
+</p:sld>
+</file>
+
+<file path=ppt/slides/slide103.xml><?xml version="1.0" encoding="utf-8"?>
+<p:sld xmlns:a="http://schemas.openxmlformats.org/drawingml/2006/main" xmlns:p="http://schemas.openxmlformats.org/presentationml/2006/main" xmlns:r="http://schemas.openxmlformats.org/officeDocument/2006/relationships">
+  <p:cSld>
+    <p:bg>
+      <p:bgPr>
+        <a:gradFill rotWithShape="1">
+          <a:gsLst>
+            <a:gs pos="0">
+              <a:srgbClr val="1F4E79"/>
+            </a:gs>
+            <a:gs pos="100000">
+              <a:srgbClr val="9DC3E6"/>
+            </a:gs>
+          </a:gsLst>
+          <a:lin ang="5400000" scaled="0"/>
+        </a:gradFill>
+        <a:effectLst/>
+      </p:bgPr>
+    </p:bg>
+    <p:spTree>
+      <p:nvGrpSpPr>
+        <p:cNvPr id="1" name=""/>
+        <p:cNvGrpSpPr/>
+        <p:nvPr/>
+      </p:nvGrpSpPr>
+      <p:grpSpPr/>
+    </p:spTree>
+  </p:cSld>
+  <p:clrMapOvr>
+    <a:masterClrMapping/>
+  </p:clrMapOvr>
+</p:sld>
+</file>
+
+<file path=ppt/slides/slide104.xml><?xml version="1.0" encoding="utf-8"?>
+<p:sld xmlns:a="http://schemas.openxmlformats.org/drawingml/2006/main" xmlns:p="http://schemas.openxmlformats.org/presentationml/2006/main" xmlns:r="http://schemas.openxmlformats.org/officeDocument/2006/relationships">
+  <p:cSld>
+    <p:bg>
+      <p:bgPr>
+        <a:pattFill prst="dkDnDiag">
+          <a:fgClr>
+            <a:srgbClr val="C00000"/>
+          </a:fgClr>
+          <a:bgClr>
+            <a:srgbClr val="FFF2CC"/>
+          </a:bgClr>
+        </a:pattFill>
+        <a:effectLst/>
+      </p:bgPr>
+    </p:bg>
+    <p:spTree>
+      <p:nvGrpSpPr>
+        <p:cNvPr id="1" name=""/>
+        <p:cNvGrpSpPr/>
+        <p:nvPr/>
+      </p:nvGrpSpPr>
+      <p:grpSpPr/>
+    </p:spTree>
+  </p:cSld>
+  <p:clrMapOvr>
+    <a:masterClrMapping/>
+  </p:clrMapOvr>
+</p:sld>
+</file>
+
+<file path=ppt/slides/slide105.xml><?xml version="1.0" encoding="utf-8"?>
+<p:sld xmlns:a="http://schemas.openxmlformats.org/drawingml/2006/main" xmlns:p="http://schemas.openxmlformats.org/presentationml/2006/main" xmlns:r="http://schemas.openxmlformats.org/officeDocument/2006/relationships">
+  <p:cSld>
+    <p:bg>
+      <p:bgPr>
+        <a:blipFill dpi="0" rotWithShape="1">
+          <a:blip r:embed="rId2"/>
+          <a:srcRect/>
+          <a:stretch>
+            <a:fillRect/>
+          </a:stretch>
+        </a:blipFill>
+        <a:effectLst/>
+      </p:bgPr>
+    </p:bg>
+    <p:spTree>
+      <p:nvGrpSpPr>
+        <p:cNvPr id="1" name=""/>
+        <p:cNvGrpSpPr/>
+        <p:nvPr/>
+      </p:nvGrpSpPr>
+      <p:grpSpPr/>
     </p:spTree>
   </p:cSld>
   <p:clrMapOvr>

--- a/test_fixtures/test_features.pptx
+++ b/test_fixtures/test_features.pptx
@@ -110,6 +110,7 @@
     <p:sldId id="358" r:id="rId111"/>
     <p:sldId id="359" r:id="rId112"/>
     <p:sldId id="360" r:id="rId113"/>
+    <p:sldId id="361" r:id="rId114"/>
   </p:sldIdLst>
   <p:sldSz cx="9144000" cy="6858000" type="screen4x3"/>
   <p:notesSz cx="6858000" cy="9144000"/>
@@ -9127,6 +9128,148 @@
   <p:clrMapOvr>
     <a:masterClrMapping/>
   </p:clrMapOvr>
+</p:sld>
+</file>
+
+<file path=ppt/slides/slide106.xml><?xml version="1.0" encoding="utf-8"?>
+<p:sld xmlns:a="http://schemas.openxmlformats.org/drawingml/2006/main" xmlns:p="http://schemas.openxmlformats.org/presentationml/2006/main" xmlns:r="http://schemas.openxmlformats.org/officeDocument/2006/relationships">
+  <p:cSld>
+    <p:spTree>
+      <p:nvGrpSpPr>
+        <p:cNvPr id="1" name=""/>
+        <p:cNvGrpSpPr/>
+        <p:nvPr/>
+      </p:nvGrpSpPr>
+      <p:grpSpPr/>
+      <p:sp>
+        <p:nvSpPr>
+          <p:cNvPr id="2" name="Revenue Box" descr="Quarterly revenue, up 12% &amp; rising" title="Revenue"/>
+          <p:cNvSpPr/>
+          <p:nvPr/>
+        </p:nvSpPr>
+        <p:spPr>
+          <a:xfrm>
+            <a:off x="914400" y="914400"/>
+            <a:ext cx="2743200" cy="1371600"/>
+          </a:xfrm>
+          <a:prstGeom prst="rect">
+            <a:avLst/>
+          </a:prstGeom>
+        </p:spPr>
+        <p:style>
+          <a:lnRef idx="1">
+            <a:schemeClr val="accent1"/>
+          </a:lnRef>
+          <a:fillRef idx="3">
+            <a:schemeClr val="accent1"/>
+          </a:fillRef>
+          <a:effectRef idx="2">
+            <a:schemeClr val="accent1"/>
+          </a:effectRef>
+          <a:fontRef idx="minor">
+            <a:schemeClr val="lt1"/>
+          </a:fontRef>
+        </p:style>
+        <p:txBody>
+          <a:bodyPr rtlCol="0" anchor="ctr"/>
+          <a:lstStyle/>
+          <a:p>
+            <a:r>
+              <a:t>Revenue</a:t>
+            </a:r>
+          </a:p>
+        </p:txBody>
+      </p:sp>
+      <p:pic>
+        <p:nvPicPr>
+          <p:cNvPr id="3" name="Logo" descr="Company logo"/>
+          <p:cNvPicPr>
+            <a:picLocks noChangeAspect="1"/>
+          </p:cNvPicPr>
+          <p:nvPr/>
+        </p:nvPicPr>
+        <p:blipFill>
+          <a:blip r:embed="rId2"/>
+          <a:stretch>
+            <a:fillRect/>
+          </a:stretch>
+        </p:blipFill>
+        <p:spPr>
+          <a:xfrm>
+            <a:off x="4572000" y="914400"/>
+            <a:ext cx="1828800" cy="1828800"/>
+          </a:xfrm>
+          <a:prstGeom prst="rect">
+            <a:avLst/>
+          </a:prstGeom>
+        </p:spPr>
+      </p:pic>
+    </p:spTree>
+  </p:cSld>
+  <p:clrMapOvr>
+    <a:masterClrMapping/>
+  </p:clrMapOvr>
+  <p:timing>
+    <p:tnLst>
+      <p:par>
+        <p:cTn id="1" dur="indefinite" restart="never" nodeType="tmRoot">
+          <p:childTnLst>
+            <p:seq concurrent="1" nextAc="seek">
+              <p:cTn id="2" dur="indefinite" nodeType="mainSeq">
+                <p:childTnLst>
+                  <p:par>
+                    <p:cTn id="3" fill="hold">
+                      <p:stCondLst>
+                        <p:cond delay="indefinite"/>
+                      </p:stCondLst>
+                      <p:childTnLst>
+                        <p:par>
+                          <p:cTn id="4" fill="hold">
+                            <p:stCondLst>
+                              <p:cond delay="0"/>
+                            </p:stCondLst>
+                            <p:childTnLst>
+                              <p:par>
+                                <p:cTn id="5" presetID="1" presetClass="entr" presetSubtype="0" fill="hold" nodeType="clickEffect">
+                                  <p:stCondLst>
+                                    <p:cond delay="0"/>
+                                  </p:stCondLst>
+                                  <p:childTnLst>
+                                    <p:set>
+                                      <p:cBhvr>
+                                        <p:cTn id="6" dur="1" fill="hold">
+                                          <p:stCondLst>
+                                            <p:cond delay="0"/>
+                                          </p:stCondLst>
+                                        </p:cTn>
+                                        <p:tgtEl>
+                                          <p:spTgt spid="2"/>
+                                        </p:tgtEl>
+                                        <p:attrNameLst>
+                                          <p:attrName>style.visibility</p:attrName>
+                                        </p:attrNameLst>
+                                      </p:cBhvr>
+                                      <p:to>
+                                        <p:strVal val="visible"/>
+                                      </p:to>
+                                    </p:set>
+                                  </p:childTnLst>
+                                </p:cTn>
+                              </p:par>
+                            </p:childTnLst>
+                          </p:cTn>
+                        </p:par>
+                      </p:childTnLst>
+                    </p:cTn>
+                  </p:par>
+                </p:childTnLst>
+              </p:cTn>
+            </p:seq>
+          </p:childTnLst>
+        </p:cTn>
+      </p:par>
+    </p:tnLst>
+  </p:timing>
 </p:sld>
 </file>
 

--- a/test_fixtures/test_features.pptx
+++ b/test_fixtures/test_features.pptx
@@ -111,6 +111,7 @@
     <p:sldId id="359" r:id="rId112"/>
     <p:sldId id="360" r:id="rId113"/>
     <p:sldId id="361" r:id="rId114"/>
+    <p:sldId id="362" r:id="rId115"/>
   </p:sldIdLst>
   <p:sldSz cx="9144000" cy="6858000" type="screen4x3"/>
   <p:notesSz cx="6858000" cy="9144000"/>
@@ -9270,6 +9271,102 @@
       </p:par>
     </p:tnLst>
   </p:timing>
+</p:sld>
+</file>
+
+<file path=ppt/slides/slide107.xml><?xml version="1.0" encoding="utf-8"?>
+<p:sld xmlns:a="http://schemas.openxmlformats.org/drawingml/2006/main" xmlns:p="http://schemas.openxmlformats.org/presentationml/2006/main" xmlns:r="http://schemas.openxmlformats.org/officeDocument/2006/relationships">
+  <p:cSld>
+    <p:spTree>
+      <p:nvGrpSpPr>
+        <p:cNvPr id="1" name=""/>
+        <p:cNvGrpSpPr/>
+        <p:nvPr/>
+      </p:nvGrpSpPr>
+      <p:grpSpPr/>
+      <p:sp>
+        <p:nvSpPr>
+          <p:cNvPr id="2" name="Shown"/>
+          <p:cNvSpPr/>
+          <p:nvPr/>
+        </p:nvSpPr>
+        <p:spPr>
+          <a:xfrm>
+            <a:off x="914400" y="914400"/>
+            <a:ext cx="2743200" cy="1371600"/>
+          </a:xfrm>
+          <a:prstGeom prst="rect">
+            <a:avLst/>
+          </a:prstGeom>
+        </p:spPr>
+        <p:style>
+          <a:lnRef idx="1">
+            <a:schemeClr val="accent1"/>
+          </a:lnRef>
+          <a:fillRef idx="3">
+            <a:schemeClr val="accent1"/>
+          </a:fillRef>
+          <a:effectRef idx="2">
+            <a:schemeClr val="accent1"/>
+          </a:effectRef>
+          <a:fontRef idx="minor">
+            <a:schemeClr val="lt1"/>
+          </a:fontRef>
+        </p:style>
+        <p:txBody>
+          <a:bodyPr rtlCol="0" anchor="ctr"/>
+          <a:lstStyle/>
+          <a:p>
+            <a:r>
+              <a:t>Visible</a:t>
+            </a:r>
+          </a:p>
+        </p:txBody>
+      </p:sp>
+      <p:sp>
+        <p:nvSpPr>
+          <p:cNvPr id="3" name="Hidden" hidden="1"/>
+          <p:cNvSpPr/>
+          <p:nvPr/>
+        </p:nvSpPr>
+        <p:spPr>
+          <a:xfrm>
+            <a:off x="4572000" y="914400"/>
+            <a:ext cx="2743200" cy="1371600"/>
+          </a:xfrm>
+          <a:prstGeom prst="rect">
+            <a:avLst/>
+          </a:prstGeom>
+        </p:spPr>
+        <p:style>
+          <a:lnRef idx="1">
+            <a:schemeClr val="accent1"/>
+          </a:lnRef>
+          <a:fillRef idx="3">
+            <a:schemeClr val="accent1"/>
+          </a:fillRef>
+          <a:effectRef idx="2">
+            <a:schemeClr val="accent1"/>
+          </a:effectRef>
+          <a:fontRef idx="minor">
+            <a:schemeClr val="lt1"/>
+          </a:fontRef>
+        </p:style>
+        <p:txBody>
+          <a:bodyPr rtlCol="0" anchor="ctr"/>
+          <a:lstStyle/>
+          <a:p>
+            <a:r>
+              <a:t>Hidden text</a:t>
+            </a:r>
+          </a:p>
+        </p:txBody>
+      </p:sp>
+    </p:spTree>
+  </p:cSld>
+  <p:clrMapOvr>
+    <a:masterClrMapping/>
+  </p:clrMapOvr>
 </p:sld>
 </file>
 
